--- a/thiet ke hoverboard.pptx
+++ b/thiet ke hoverboard.pptx
@@ -288,7 +288,7 @@
           <a:p>
             <a:fld id="{E7860BEC-9322-4496-85F2-13AB10B0B30B}" type="datetimeFigureOut">
               <a:rPr lang="en-US" smtClean="0"/>
-              <a:t>5/23/2026</a:t>
+              <a:t>5/25/2026</a:t>
             </a:fld>
             <a:endParaRPr lang="en-US"/>
           </a:p>
@@ -486,7 +486,7 @@
           <a:p>
             <a:fld id="{E7860BEC-9322-4496-85F2-13AB10B0B30B}" type="datetimeFigureOut">
               <a:rPr lang="en-US" smtClean="0"/>
-              <a:t>5/23/2026</a:t>
+              <a:t>5/25/2026</a:t>
             </a:fld>
             <a:endParaRPr lang="en-US"/>
           </a:p>
@@ -694,7 +694,7 @@
           <a:p>
             <a:fld id="{E7860BEC-9322-4496-85F2-13AB10B0B30B}" type="datetimeFigureOut">
               <a:rPr lang="en-US" smtClean="0"/>
-              <a:t>5/23/2026</a:t>
+              <a:t>5/25/2026</a:t>
             </a:fld>
             <a:endParaRPr lang="en-US"/>
           </a:p>
@@ -892,7 +892,7 @@
           <a:p>
             <a:fld id="{E7860BEC-9322-4496-85F2-13AB10B0B30B}" type="datetimeFigureOut">
               <a:rPr lang="en-US" smtClean="0"/>
-              <a:t>5/23/2026</a:t>
+              <a:t>5/25/2026</a:t>
             </a:fld>
             <a:endParaRPr lang="en-US"/>
           </a:p>
@@ -1167,7 +1167,7 @@
           <a:p>
             <a:fld id="{E7860BEC-9322-4496-85F2-13AB10B0B30B}" type="datetimeFigureOut">
               <a:rPr lang="en-US" smtClean="0"/>
-              <a:t>5/23/2026</a:t>
+              <a:t>5/25/2026</a:t>
             </a:fld>
             <a:endParaRPr lang="en-US"/>
           </a:p>
@@ -1432,7 +1432,7 @@
           <a:p>
             <a:fld id="{E7860BEC-9322-4496-85F2-13AB10B0B30B}" type="datetimeFigureOut">
               <a:rPr lang="en-US" smtClean="0"/>
-              <a:t>5/23/2026</a:t>
+              <a:t>5/25/2026</a:t>
             </a:fld>
             <a:endParaRPr lang="en-US"/>
           </a:p>
@@ -1844,7 +1844,7 @@
           <a:p>
             <a:fld id="{E7860BEC-9322-4496-85F2-13AB10B0B30B}" type="datetimeFigureOut">
               <a:rPr lang="en-US" smtClean="0"/>
-              <a:t>5/23/2026</a:t>
+              <a:t>5/25/2026</a:t>
             </a:fld>
             <a:endParaRPr lang="en-US"/>
           </a:p>
@@ -1985,7 +1985,7 @@
           <a:p>
             <a:fld id="{E7860BEC-9322-4496-85F2-13AB10B0B30B}" type="datetimeFigureOut">
               <a:rPr lang="en-US" smtClean="0"/>
-              <a:t>5/23/2026</a:t>
+              <a:t>5/25/2026</a:t>
             </a:fld>
             <a:endParaRPr lang="en-US"/>
           </a:p>
@@ -2098,7 +2098,7 @@
           <a:p>
             <a:fld id="{E7860BEC-9322-4496-85F2-13AB10B0B30B}" type="datetimeFigureOut">
               <a:rPr lang="en-US" smtClean="0"/>
-              <a:t>5/23/2026</a:t>
+              <a:t>5/25/2026</a:t>
             </a:fld>
             <a:endParaRPr lang="en-US"/>
           </a:p>
@@ -2409,7 +2409,7 @@
           <a:p>
             <a:fld id="{E7860BEC-9322-4496-85F2-13AB10B0B30B}" type="datetimeFigureOut">
               <a:rPr lang="en-US" smtClean="0"/>
-              <a:t>5/23/2026</a:t>
+              <a:t>5/25/2026</a:t>
             </a:fld>
             <a:endParaRPr lang="en-US"/>
           </a:p>
@@ -2697,7 +2697,7 @@
           <a:p>
             <a:fld id="{E7860BEC-9322-4496-85F2-13AB10B0B30B}" type="datetimeFigureOut">
               <a:rPr lang="en-US" smtClean="0"/>
-              <a:t>5/23/2026</a:t>
+              <a:t>5/25/2026</a:t>
             </a:fld>
             <a:endParaRPr lang="en-US"/>
           </a:p>
@@ -2938,7 +2938,7 @@
           <a:p>
             <a:fld id="{E7860BEC-9322-4496-85F2-13AB10B0B30B}" type="datetimeFigureOut">
               <a:rPr lang="en-US" smtClean="0"/>
-              <a:t>5/23/2026</a:t>
+              <a:t>5/25/2026</a:t>
             </a:fld>
             <a:endParaRPr lang="en-US"/>
           </a:p>
@@ -4022,8 +4022,8 @@
           </a:fontRef>
         </p:style>
       </p:cxnSp>
-      <mc:AlternateContent xmlns:mc="http://schemas.openxmlformats.org/markup-compatibility/2006">
-        <mc:Choice xmlns:a14="http://schemas.microsoft.com/office/drawing/2010/main" Requires="a14">
+      <mc:AlternateContent xmlns:mc="http://schemas.openxmlformats.org/markup-compatibility/2006" xmlns:a14="http://schemas.microsoft.com/office/drawing/2010/main">
+        <mc:Choice Requires="a14">
           <p:sp>
             <p:nvSpPr>
               <p:cNvPr id="21" name="TextBox 20">
@@ -4069,11 +4069,12 @@
                     </m:oMath>
                   </m:oMathPara>
                 </a14:m>
+                <a:endParaRPr/>
               </a:p>
             </p:txBody>
           </p:sp>
         </mc:Choice>
-        <mc:Fallback>
+        <mc:Fallback xmlns="">
           <p:sp>
             <p:nvSpPr>
               <p:cNvPr id="21" name="TextBox 20">
@@ -4603,8 +4604,8 @@
           </a:p>
         </p:txBody>
       </p:sp>
-      <mc:AlternateContent xmlns:mc="http://schemas.openxmlformats.org/markup-compatibility/2006">
-        <mc:Choice xmlns:a14="http://schemas.microsoft.com/office/drawing/2010/main" Requires="a14">
+      <mc:AlternateContent xmlns:mc="http://schemas.openxmlformats.org/markup-compatibility/2006" xmlns:a14="http://schemas.microsoft.com/office/drawing/2010/main">
+        <mc:Choice Requires="a14">
           <p:sp>
             <p:nvSpPr>
               <p:cNvPr id="18" name="TextBox 17">
@@ -4633,6 +4634,7 @@
               </a:bodyPr>
               <a:lstStyle/>
               <a:p>
+                <a:pPr/>
                 <a14:m>
                   <m:oMathPara xmlns:m="http://schemas.openxmlformats.org/officeDocument/2006/math">
                     <m:oMathParaPr>
@@ -4665,7 +4667,7 @@
             </p:txBody>
           </p:sp>
         </mc:Choice>
-        <mc:Fallback>
+        <mc:Fallback xmlns="">
           <p:sp>
             <p:nvSpPr>
               <p:cNvPr id="18" name="TextBox 17">
@@ -5569,8 +5571,8 @@
           </a:p>
         </p:txBody>
       </p:sp>
-      <mc:AlternateContent xmlns:mc="http://schemas.openxmlformats.org/markup-compatibility/2006">
-        <mc:Choice xmlns:a14="http://schemas.microsoft.com/office/drawing/2010/main" Requires="a14">
+      <mc:AlternateContent xmlns:mc="http://schemas.openxmlformats.org/markup-compatibility/2006" xmlns:a14="http://schemas.microsoft.com/office/drawing/2010/main">
+        <mc:Choice Requires="a14">
           <p:sp>
             <p:nvSpPr>
               <p:cNvPr id="24" name="TextBox 23">
@@ -5684,7 +5686,7 @@
             </p:txBody>
           </p:sp>
         </mc:Choice>
-        <mc:Fallback>
+        <mc:Fallback xmlns="">
           <p:sp>
             <p:nvSpPr>
               <p:cNvPr id="24" name="TextBox 23">
@@ -5945,8 +5947,8 @@
           </p:sp>
         </mc:Fallback>
       </mc:AlternateContent>
-      <mc:AlternateContent xmlns:mc="http://schemas.openxmlformats.org/markup-compatibility/2006">
-        <mc:Choice xmlns:a14="http://schemas.microsoft.com/office/drawing/2010/main" Requires="a14">
+      <mc:AlternateContent xmlns:mc="http://schemas.openxmlformats.org/markup-compatibility/2006" xmlns:a14="http://schemas.microsoft.com/office/drawing/2010/main">
+        <mc:Choice Requires="a14">
           <p:sp>
             <p:nvSpPr>
               <p:cNvPr id="50" name="TextBox 49">
@@ -6060,7 +6062,7 @@
             </p:txBody>
           </p:sp>
         </mc:Choice>
-        <mc:Fallback>
+        <mc:Fallback xmlns="">
           <p:sp>
             <p:nvSpPr>
               <p:cNvPr id="50" name="TextBox 49">
@@ -12994,7 +12996,7 @@
           <a:p>
             <a:r>
               <a:rPr lang="en-US"/>
-              <a:t>35 mm</a:t>
+              <a:t>41 mm</a:t>
             </a:r>
           </a:p>
         </p:txBody>
@@ -13090,7 +13092,7 @@
         <p:spPr>
           <a:xfrm>
             <a:off x="3921792" y="5113126"/>
-            <a:ext cx="1217000" cy="369332"/>
+            <a:ext cx="1093569" cy="369332"/>
           </a:xfrm>
           <a:prstGeom prst="rect">
             <a:avLst/>
@@ -13105,7 +13107,7 @@
           <a:p>
             <a:r>
               <a:rPr lang="en-US"/>
-              <a:t>95.65 </a:t>
+              <a:t>97.4 </a:t>
             </a:r>
             <a:r>
               <a:rPr lang="en-US" err="1"/>
@@ -13403,8 +13405,8 @@
           </a:fontRef>
         </p:style>
       </p:cxnSp>
-      <mc:AlternateContent xmlns:mc="http://schemas.openxmlformats.org/markup-compatibility/2006">
-        <mc:Choice xmlns:a14="http://schemas.microsoft.com/office/drawing/2010/main" Requires="a14">
+      <mc:AlternateContent xmlns:mc="http://schemas.openxmlformats.org/markup-compatibility/2006" xmlns:a14="http://schemas.microsoft.com/office/drawing/2010/main">
+        <mc:Choice Requires="a14">
           <p:sp>
             <p:nvSpPr>
               <p:cNvPr id="15" name="TextBox 14">
@@ -13452,7 +13454,7 @@
             </p:txBody>
           </p:sp>
         </mc:Choice>
-        <mc:Fallback>
+        <mc:Fallback xmlns="">
           <p:sp>
             <p:nvSpPr>
               <p:cNvPr id="15" name="TextBox 14">
@@ -14497,7 +14499,7 @@
           <a:p>
             <a:r>
               <a:rPr lang="en-US"/>
-              <a:t>30 mm</a:t>
+              <a:t>25 mm</a:t>
             </a:r>
           </a:p>
         </p:txBody>
@@ -15358,8 +15360,8 @@
           </a:fontRef>
         </p:style>
       </p:cxnSp>
-      <mc:AlternateContent xmlns:mc="http://schemas.openxmlformats.org/markup-compatibility/2006">
-        <mc:Choice xmlns:a14="http://schemas.microsoft.com/office/drawing/2010/main" Requires="a14">
+      <mc:AlternateContent xmlns:mc="http://schemas.openxmlformats.org/markup-compatibility/2006" xmlns:a14="http://schemas.microsoft.com/office/drawing/2010/main">
+        <mc:Choice Requires="a14">
           <p:sp>
             <p:nvSpPr>
               <p:cNvPr id="21" name="TextBox 20">
@@ -15400,14 +15402,7 @@
                           <a:latin typeface="Cambria Math" panose="02040503050406030204" pitchFamily="18" charset="0"/>
                           <a:ea typeface="Cambria Math" panose="02040503050406030204" pitchFamily="18" charset="0"/>
                         </a:rPr>
-                        <m:t>10</m:t>
-                      </m:r>
-                      <m:r>
-                        <a:rPr lang="en-US" b="0" i="1" smtClean="0">
-                          <a:latin typeface="Cambria Math" panose="02040503050406030204" pitchFamily="18" charset="0"/>
-                          <a:ea typeface="Cambria Math" panose="02040503050406030204" pitchFamily="18" charset="0"/>
-                        </a:rPr>
-                        <m:t>°</m:t>
+                        <m:t>10°</m:t>
                       </m:r>
                     </m:oMath>
                   </m:oMathPara>
@@ -15417,7 +15412,7 @@
             </p:txBody>
           </p:sp>
         </mc:Choice>
-        <mc:Fallback>
+        <mc:Fallback xmlns="">
           <p:sp>
             <p:nvSpPr>
               <p:cNvPr id="21" name="TextBox 20">
@@ -15907,13 +15902,15 @@
               </a:ext>
             </a:extLst>
           </p:cNvPr>
-          <p:cNvCxnSpPr/>
+          <p:cNvCxnSpPr>
+            <a:cxnSpLocks/>
+          </p:cNvCxnSpPr>
           <p:nvPr/>
         </p:nvCxnSpPr>
         <p:spPr>
           <a:xfrm flipV="1">
-            <a:off x="3886200" y="2734056"/>
-            <a:ext cx="0" cy="1984248"/>
+            <a:off x="3886200" y="2578608"/>
+            <a:ext cx="0" cy="2139696"/>
           </a:xfrm>
           <a:prstGeom prst="line">
             <a:avLst/>
@@ -15943,13 +15940,15 @@
               </a:ext>
             </a:extLst>
           </p:cNvPr>
-          <p:cNvCxnSpPr/>
+          <p:cNvCxnSpPr>
+            <a:cxnSpLocks/>
+          </p:cNvCxnSpPr>
           <p:nvPr/>
         </p:nvCxnSpPr>
         <p:spPr>
           <a:xfrm flipV="1">
-            <a:off x="7159752" y="2734056"/>
-            <a:ext cx="0" cy="1984248"/>
+            <a:off x="7159752" y="2578608"/>
+            <a:ext cx="12192" cy="2139696"/>
           </a:xfrm>
           <a:prstGeom prst="line">
             <a:avLst/>
@@ -15986,7 +15985,7 @@
         </p:nvCxnSpPr>
         <p:spPr>
           <a:xfrm>
-            <a:off x="3886200" y="2734056"/>
+            <a:off x="3898392" y="2578608"/>
             <a:ext cx="3273552" cy="0"/>
           </a:xfrm>
           <a:prstGeom prst="line">
@@ -16017,13 +16016,15 @@
               </a:ext>
             </a:extLst>
           </p:cNvPr>
-          <p:cNvCxnSpPr/>
+          <p:cNvCxnSpPr>
+            <a:cxnSpLocks/>
+          </p:cNvCxnSpPr>
           <p:nvPr/>
         </p:nvCxnSpPr>
         <p:spPr>
-          <a:xfrm flipV="1">
-            <a:off x="3419856" y="1472184"/>
-            <a:ext cx="0" cy="822960"/>
+          <a:xfrm>
+            <a:off x="7068312" y="2578608"/>
+            <a:ext cx="950976" cy="0"/>
           </a:xfrm>
           <a:prstGeom prst="line">
             <a:avLst/>
@@ -16351,7 +16352,7 @@
           <a:p>
             <a:r>
               <a:rPr lang="en-US"/>
-              <a:t>50 mm</a:t>
+              <a:t>68 mm</a:t>
             </a:r>
           </a:p>
         </p:txBody>
@@ -16386,7 +16387,7 @@
           <a:p>
             <a:r>
               <a:rPr lang="en-US"/>
-              <a:t>30 mm</a:t>
+              <a:t>25 mm</a:t>
             </a:r>
           </a:p>
         </p:txBody>
@@ -16536,6 +16537,175 @@
         <p:spPr>
           <a:xfrm>
             <a:off x="3278566" y="5201150"/>
+            <a:ext cx="748923" cy="369332"/>
+          </a:xfrm>
+          <a:prstGeom prst="rect">
+            <a:avLst/>
+          </a:prstGeom>
+          <a:noFill/>
+        </p:spPr>
+        <p:txBody>
+          <a:bodyPr wrap="none" rtlCol="0">
+            <a:spAutoFit/>
+          </a:bodyPr>
+          <a:lstStyle/>
+          <a:p>
+            <a:r>
+              <a:rPr lang="en-US"/>
+              <a:t>9 mm</a:t>
+            </a:r>
+          </a:p>
+        </p:txBody>
+      </p:sp>
+      <p:cxnSp>
+        <p:nvCxnSpPr>
+          <p:cNvPr id="27" name="Straight Connector 26">
+            <a:extLst>
+              <a:ext uri="{FF2B5EF4-FFF2-40B4-BE49-F238E27FC236}">
+                <a16:creationId xmlns:a16="http://schemas.microsoft.com/office/drawing/2014/main" id="{315FF25A-FC66-2B66-7B69-D2D128F63E3D}"/>
+              </a:ext>
+            </a:extLst>
+          </p:cNvPr>
+          <p:cNvCxnSpPr/>
+          <p:nvPr/>
+        </p:nvCxnSpPr>
+        <p:spPr>
+          <a:xfrm flipV="1">
+            <a:off x="3419856" y="1472184"/>
+            <a:ext cx="0" cy="822960"/>
+          </a:xfrm>
+          <a:prstGeom prst="line">
+            <a:avLst/>
+          </a:prstGeom>
+          <a:ln w="19050" cap="flat" cmpd="sng" algn="ctr">
+            <a:solidFill>
+              <a:schemeClr val="dk1"/>
+            </a:solidFill>
+            <a:prstDash val="dash"/>
+            <a:round/>
+            <a:headEnd type="none" w="med" len="med"/>
+            <a:tailEnd type="none" w="med" len="med"/>
+          </a:ln>
+        </p:spPr>
+        <p:style>
+          <a:lnRef idx="0">
+            <a:scrgbClr r="0" g="0" b="0"/>
+          </a:lnRef>
+          <a:fillRef idx="0">
+            <a:scrgbClr r="0" g="0" b="0"/>
+          </a:fillRef>
+          <a:effectRef idx="0">
+            <a:scrgbClr r="0" g="0" b="0"/>
+          </a:effectRef>
+          <a:fontRef idx="minor">
+            <a:schemeClr val="tx1"/>
+          </a:fontRef>
+        </p:style>
+      </p:cxnSp>
+      <p:cxnSp>
+        <p:nvCxnSpPr>
+          <p:cNvPr id="28" name="Straight Connector 27">
+            <a:extLst>
+              <a:ext uri="{FF2B5EF4-FFF2-40B4-BE49-F238E27FC236}">
+                <a16:creationId xmlns:a16="http://schemas.microsoft.com/office/drawing/2014/main" id="{C8CEB7B1-8F0A-C990-B50E-E5FBFFB9BC79}"/>
+              </a:ext>
+            </a:extLst>
+          </p:cNvPr>
+          <p:cNvCxnSpPr>
+            <a:cxnSpLocks/>
+          </p:cNvCxnSpPr>
+          <p:nvPr/>
+        </p:nvCxnSpPr>
+        <p:spPr>
+          <a:xfrm>
+            <a:off x="7266432" y="2295144"/>
+            <a:ext cx="743712" cy="0"/>
+          </a:xfrm>
+          <a:prstGeom prst="line">
+            <a:avLst/>
+          </a:prstGeom>
+          <a:ln w="19050" cap="flat" cmpd="sng" algn="ctr">
+            <a:solidFill>
+              <a:schemeClr val="dk1"/>
+            </a:solidFill>
+            <a:prstDash val="dash"/>
+            <a:round/>
+            <a:headEnd type="none" w="med" len="med"/>
+            <a:tailEnd type="none" w="med" len="med"/>
+          </a:ln>
+        </p:spPr>
+        <p:style>
+          <a:lnRef idx="0">
+            <a:scrgbClr r="0" g="0" b="0"/>
+          </a:lnRef>
+          <a:fillRef idx="0">
+            <a:scrgbClr r="0" g="0" b="0"/>
+          </a:fillRef>
+          <a:effectRef idx="0">
+            <a:scrgbClr r="0" g="0" b="0"/>
+          </a:effectRef>
+          <a:fontRef idx="minor">
+            <a:schemeClr val="tx1"/>
+          </a:fontRef>
+        </p:style>
+      </p:cxnSp>
+      <p:cxnSp>
+        <p:nvCxnSpPr>
+          <p:cNvPr id="30" name="Straight Arrow Connector 29">
+            <a:extLst>
+              <a:ext uri="{FF2B5EF4-FFF2-40B4-BE49-F238E27FC236}">
+                <a16:creationId xmlns:a16="http://schemas.microsoft.com/office/drawing/2014/main" id="{94AAB912-A2CF-1764-EBDE-E7EA59CC7504}"/>
+              </a:ext>
+            </a:extLst>
+          </p:cNvPr>
+          <p:cNvCxnSpPr>
+            <a:cxnSpLocks/>
+          </p:cNvCxnSpPr>
+          <p:nvPr/>
+        </p:nvCxnSpPr>
+        <p:spPr>
+          <a:xfrm>
+            <a:off x="7862315" y="2295144"/>
+            <a:ext cx="4572" cy="283464"/>
+          </a:xfrm>
+          <a:prstGeom prst="straightConnector1">
+            <a:avLst/>
+          </a:prstGeom>
+          <a:ln>
+            <a:headEnd type="triangle"/>
+            <a:tailEnd type="triangle"/>
+          </a:ln>
+        </p:spPr>
+        <p:style>
+          <a:lnRef idx="2">
+            <a:schemeClr val="accent1"/>
+          </a:lnRef>
+          <a:fillRef idx="0">
+            <a:schemeClr val="accent1"/>
+          </a:fillRef>
+          <a:effectRef idx="1">
+            <a:schemeClr val="accent1"/>
+          </a:effectRef>
+          <a:fontRef idx="minor">
+            <a:schemeClr val="tx1"/>
+          </a:fontRef>
+        </p:style>
+      </p:cxnSp>
+      <p:sp>
+        <p:nvSpPr>
+          <p:cNvPr id="33" name="TextBox 32">
+            <a:extLst>
+              <a:ext uri="{FF2B5EF4-FFF2-40B4-BE49-F238E27FC236}">
+                <a16:creationId xmlns:a16="http://schemas.microsoft.com/office/drawing/2014/main" id="{A2854028-0A0D-4B19-B454-B770C1676E31}"/>
+              </a:ext>
+            </a:extLst>
+          </p:cNvPr>
+          <p:cNvSpPr txBox="1"/>
+          <p:nvPr/>
+        </p:nvSpPr>
+        <p:spPr>
+          <a:xfrm>
+            <a:off x="8010144" y="2254996"/>
             <a:ext cx="748923" cy="369332"/>
           </a:xfrm>
           <a:prstGeom prst="rect">
@@ -16851,7 +17021,7 @@
                 </a14:m>
                 <a:r>
                   <a:rPr lang="en-US"/>
-                  <a:t>37mm</a:t>
+                  <a:t>35mm</a:t>
                 </a:r>
               </a:p>
             </p:txBody>
@@ -17149,7 +17319,7 @@
                         <a:latin typeface="Cambria Math" panose="02040503050406030204" pitchFamily="18" charset="0"/>
                         <a:ea typeface="Cambria Math" panose="02040503050406030204" pitchFamily="18" charset="0"/>
                       </a:rPr>
-                      <m:t>23</m:t>
+                      <m:t>25</m:t>
                     </m:r>
                   </m:oMath>
                 </a14:m>
@@ -19447,7 +19617,7 @@
                 <a:ea typeface="Aptos" panose="020B0004020202020204" pitchFamily="34" charset="0"/>
                 <a:cs typeface="Times New Roman" panose="02020603050405020304" pitchFamily="18" charset="0"/>
               </a:rPr>
-              <a:t>30 </a:t>
+              <a:t>41 </a:t>
             </a:r>
             <a:r>
               <a:rPr lang="en-US" sz="1300" kern="100">
@@ -27100,8 +27270,8 @@
           </a:fontRef>
         </p:style>
       </p:cxnSp>
-      <mc:AlternateContent xmlns:mc="http://schemas.openxmlformats.org/markup-compatibility/2006">
-        <mc:Choice xmlns:a14="http://schemas.microsoft.com/office/drawing/2010/main" Requires="a14">
+      <mc:AlternateContent xmlns:mc="http://schemas.openxmlformats.org/markup-compatibility/2006" xmlns:a14="http://schemas.microsoft.com/office/drawing/2010/main">
+        <mc:Choice Requires="a14">
           <p:sp>
             <p:nvSpPr>
               <p:cNvPr id="15" name="TextBox 14">
@@ -27204,7 +27374,7 @@
             </p:txBody>
           </p:sp>
         </mc:Choice>
-        <mc:Fallback>
+        <mc:Fallback xmlns="">
           <p:sp>
             <p:nvSpPr>
               <p:cNvPr id="15" name="TextBox 14">
@@ -27297,8 +27467,8 @@
           </a:fontRef>
         </p:style>
       </p:cxnSp>
-      <mc:AlternateContent xmlns:mc="http://schemas.openxmlformats.org/markup-compatibility/2006">
-        <mc:Choice xmlns:a14="http://schemas.microsoft.com/office/drawing/2010/main" Requires="a14">
+      <mc:AlternateContent xmlns:mc="http://schemas.openxmlformats.org/markup-compatibility/2006" xmlns:a14="http://schemas.microsoft.com/office/drawing/2010/main">
+        <mc:Choice Requires="a14">
           <p:sp>
             <p:nvSpPr>
               <p:cNvPr id="27" name="TextBox 26">
@@ -27366,7 +27536,7 @@
             </p:txBody>
           </p:sp>
         </mc:Choice>
-        <mc:Fallback>
+        <mc:Fallback xmlns="">
           <p:sp>
             <p:nvSpPr>
               <p:cNvPr id="27" name="TextBox 26">
@@ -27733,8 +27903,8 @@
           </a:fontRef>
         </p:style>
       </p:cxnSp>
-      <mc:AlternateContent xmlns:mc="http://schemas.openxmlformats.org/markup-compatibility/2006">
-        <mc:Choice xmlns:a14="http://schemas.microsoft.com/office/drawing/2010/main" Requires="a14">
+      <mc:AlternateContent xmlns:mc="http://schemas.openxmlformats.org/markup-compatibility/2006" xmlns:a14="http://schemas.microsoft.com/office/drawing/2010/main">
+        <mc:Choice Requires="a14">
           <p:sp>
             <p:nvSpPr>
               <p:cNvPr id="59" name="TextBox 58">
@@ -27796,7 +27966,7 @@
             </p:txBody>
           </p:sp>
         </mc:Choice>
-        <mc:Fallback>
+        <mc:Fallback xmlns="">
           <p:sp>
             <p:nvSpPr>
               <p:cNvPr id="59" name="TextBox 58">
@@ -29462,8 +29632,8 @@
           </a:fontRef>
         </p:style>
       </p:cxnSp>
-      <mc:AlternateContent xmlns:mc="http://schemas.openxmlformats.org/markup-compatibility/2006">
-        <mc:Choice xmlns:a14="http://schemas.microsoft.com/office/drawing/2010/main" Requires="a14">
+      <mc:AlternateContent xmlns:mc="http://schemas.openxmlformats.org/markup-compatibility/2006" xmlns:a14="http://schemas.microsoft.com/office/drawing/2010/main">
+        <mc:Choice Requires="a14">
           <p:sp>
             <p:nvSpPr>
               <p:cNvPr id="8" name="TextBox 7">
@@ -29513,32 +29683,44 @@
                           <m:f>
                             <m:fPr>
                               <m:ctrlPr>
-                                <a:rPr lang="en-US" i="1"/>
+                                <a:rPr lang="en-US" i="1">
+                                  <a:latin typeface="Cambria Math" panose="02040503050406030204" pitchFamily="18" charset="0"/>
+                                </a:rPr>
                               </m:ctrlPr>
                             </m:fPr>
                             <m:num>
                               <m:r>
-                                <a:rPr lang="en-US" i="1"/>
+                                <a:rPr lang="en-US" i="1">
+                                  <a:latin typeface="Cambria Math" panose="02040503050406030204" pitchFamily="18" charset="0"/>
+                                </a:rPr>
                                 <m:t>𝑀</m:t>
                               </m:r>
                               <m:r>
-                                <a:rPr lang="en-US" i="1"/>
+                                <a:rPr lang="en-US" i="1">
+                                  <a:latin typeface="Cambria Math" panose="02040503050406030204" pitchFamily="18" charset="0"/>
+                                </a:rPr>
                                 <m:t>+</m:t>
                               </m:r>
                               <m:r>
-                                <a:rPr lang="en-US" i="1"/>
+                                <a:rPr lang="en-US" i="1">
+                                  <a:latin typeface="Cambria Math" panose="02040503050406030204" pitchFamily="18" charset="0"/>
+                                </a:rPr>
                                 <m:t>𝑚</m:t>
                               </m:r>
                             </m:num>
                             <m:den>
                               <m:r>
-                                <a:rPr lang="en-US" i="1"/>
+                                <a:rPr lang="en-US" i="1">
+                                  <a:latin typeface="Cambria Math" panose="02040503050406030204" pitchFamily="18" charset="0"/>
+                                </a:rPr>
                                 <m:t>2</m:t>
                               </m:r>
                             </m:den>
                           </m:f>
                           <m:r>
-                            <a:rPr lang="el-GR" i="1"/>
+                            <a:rPr lang="el-GR" i="1">
+                              <a:latin typeface="Cambria Math" panose="02040503050406030204" pitchFamily="18" charset="0"/>
+                            </a:rPr>
                             <m:t>𝑔</m:t>
                           </m:r>
                         </m:e>
@@ -29551,7 +29733,7 @@
             </p:txBody>
           </p:sp>
         </mc:Choice>
-        <mc:Fallback>
+        <mc:Fallback xmlns="">
           <p:sp>
             <p:nvSpPr>
               <p:cNvPr id="8" name="TextBox 7">
@@ -29596,8 +29778,8 @@
           </p:sp>
         </mc:Fallback>
       </mc:AlternateContent>
-      <mc:AlternateContent xmlns:mc="http://schemas.openxmlformats.org/markup-compatibility/2006">
-        <mc:Choice xmlns:a14="http://schemas.microsoft.com/office/drawing/2010/main" Requires="a14">
+      <mc:AlternateContent xmlns:mc="http://schemas.openxmlformats.org/markup-compatibility/2006" xmlns:a14="http://schemas.microsoft.com/office/drawing/2010/main">
+        <mc:Choice Requires="a14">
           <p:sp>
             <p:nvSpPr>
               <p:cNvPr id="10" name="TextBox 9">
@@ -29665,7 +29847,7 @@
             </p:txBody>
           </p:sp>
         </mc:Choice>
-        <mc:Fallback>
+        <mc:Fallback xmlns="">
           <p:sp>
             <p:nvSpPr>
               <p:cNvPr id="10" name="TextBox 9">
@@ -29993,8 +30175,8 @@
           </a:fontRef>
         </p:style>
       </p:cxnSp>
-      <mc:AlternateContent xmlns:mc="http://schemas.openxmlformats.org/markup-compatibility/2006">
-        <mc:Choice xmlns:a14="http://schemas.microsoft.com/office/drawing/2010/main" Requires="a14">
+      <mc:AlternateContent xmlns:mc="http://schemas.openxmlformats.org/markup-compatibility/2006" xmlns:a14="http://schemas.microsoft.com/office/drawing/2010/main">
+        <mc:Choice Requires="a14">
           <p:sp>
             <p:nvSpPr>
               <p:cNvPr id="38" name="TextBox 37">
@@ -30045,7 +30227,7 @@
             </p:txBody>
           </p:sp>
         </mc:Choice>
-        <mc:Fallback>
+        <mc:Fallback xmlns="">
           <p:sp>
             <p:nvSpPr>
               <p:cNvPr id="38" name="TextBox 37">
@@ -33298,8 +33480,8 @@
           </p:sp>
         </mc:Fallback>
       </mc:AlternateContent>
-      <mc:AlternateContent xmlns:mc="http://schemas.openxmlformats.org/markup-compatibility/2006">
-        <mc:Choice xmlns:a14="http://schemas.microsoft.com/office/drawing/2010/main" Requires="a14">
+      <mc:AlternateContent xmlns:mc="http://schemas.openxmlformats.org/markup-compatibility/2006" xmlns:a14="http://schemas.microsoft.com/office/drawing/2010/main">
+        <mc:Choice Requires="a14">
           <p:sp>
             <p:nvSpPr>
               <p:cNvPr id="43" name="TextBox 42">
@@ -33413,7 +33595,7 @@
             </p:txBody>
           </p:sp>
         </mc:Choice>
-        <mc:Fallback>
+        <mc:Fallback xmlns="">
           <p:sp>
             <p:nvSpPr>
               <p:cNvPr id="43" name="TextBox 42">
@@ -33458,8 +33640,8 @@
           </p:sp>
         </mc:Fallback>
       </mc:AlternateContent>
-      <mc:AlternateContent xmlns:mc="http://schemas.openxmlformats.org/markup-compatibility/2006">
-        <mc:Choice xmlns:a14="http://schemas.microsoft.com/office/drawing/2010/main" Requires="a14">
+      <mc:AlternateContent xmlns:mc="http://schemas.openxmlformats.org/markup-compatibility/2006" xmlns:a14="http://schemas.microsoft.com/office/drawing/2010/main">
+        <mc:Choice Requires="a14">
           <p:sp>
             <p:nvSpPr>
               <p:cNvPr id="44" name="TextBox 43">
@@ -33573,7 +33755,7 @@
             </p:txBody>
           </p:sp>
         </mc:Choice>
-        <mc:Fallback>
+        <mc:Fallback xmlns="">
           <p:sp>
             <p:nvSpPr>
               <p:cNvPr id="44" name="TextBox 43">
